--- a/PUM2/Archiwum/Wyk/Wyklad2.pptx
+++ b/PUM2/Archiwum/Wyk/Wyklad2.pptx
@@ -300,7 +300,7 @@
           <a:p>
             <a:fld id="{5113504E-0C99-2340-A5F6-DD6E1A87C372}" type="datetimeFigureOut">
               <a:rPr lang="pl-PL" smtClean="0"/>
-              <a:t>8.11.2025</a:t>
+              <a:t>9.10.2026</a:t>
             </a:fld>
             <a:endParaRPr lang="pl-PL"/>
           </a:p>
@@ -466,7 +466,7 @@
           <a:p>
             <a:fld id="{F78C933E-44E9-2D43-91B0-0D2BEEFA7EB9}" type="datetimeFigureOut">
               <a:rPr lang="pl-PL" smtClean="0"/>
-              <a:t>8.11.2025</a:t>
+              <a:t>9.10.2026</a:t>
             </a:fld>
             <a:endParaRPr lang="pl-PL"/>
           </a:p>
@@ -4105,7 +4105,7 @@
           <a:p>
             <a:fld id="{91017B01-0C30-B241-B19F-621BE4770608}" type="datetimeFigureOut">
               <a:rPr lang="pl-PL" smtClean="0"/>
-              <a:t>8.11.2025</a:t>
+              <a:t>9.10.2026</a:t>
             </a:fld>
             <a:endParaRPr lang="pl-PL"/>
           </a:p>
@@ -4274,7 +4274,7 @@
           <a:p>
             <a:fld id="{91017B01-0C30-B241-B19F-621BE4770608}" type="datetimeFigureOut">
               <a:rPr lang="pl-PL" smtClean="0"/>
-              <a:t>8.11.2025</a:t>
+              <a:t>9.10.2026</a:t>
             </a:fld>
             <a:endParaRPr lang="pl-PL"/>
           </a:p>
@@ -4453,7 +4453,7 @@
           <a:p>
             <a:fld id="{91017B01-0C30-B241-B19F-621BE4770608}" type="datetimeFigureOut">
               <a:rPr lang="pl-PL" smtClean="0"/>
-              <a:t>8.11.2025</a:t>
+              <a:t>9.10.2026</a:t>
             </a:fld>
             <a:endParaRPr lang="pl-PL"/>
           </a:p>
@@ -4622,7 +4622,7 @@
           <a:p>
             <a:fld id="{91017B01-0C30-B241-B19F-621BE4770608}" type="datetimeFigureOut">
               <a:rPr lang="pl-PL" smtClean="0"/>
-              <a:t>8.11.2025</a:t>
+              <a:t>9.10.2026</a:t>
             </a:fld>
             <a:endParaRPr lang="pl-PL"/>
           </a:p>
@@ -4868,7 +4868,7 @@
           <a:p>
             <a:fld id="{91017B01-0C30-B241-B19F-621BE4770608}" type="datetimeFigureOut">
               <a:rPr lang="pl-PL" smtClean="0"/>
-              <a:t>8.11.2025</a:t>
+              <a:t>9.10.2026</a:t>
             </a:fld>
             <a:endParaRPr lang="pl-PL"/>
           </a:p>
@@ -5154,7 +5154,7 @@
           <a:p>
             <a:fld id="{91017B01-0C30-B241-B19F-621BE4770608}" type="datetimeFigureOut">
               <a:rPr lang="pl-PL" smtClean="0"/>
-              <a:t>8.11.2025</a:t>
+              <a:t>9.10.2026</a:t>
             </a:fld>
             <a:endParaRPr lang="pl-PL"/>
           </a:p>
@@ -5574,7 +5574,7 @@
           <a:p>
             <a:fld id="{91017B01-0C30-B241-B19F-621BE4770608}" type="datetimeFigureOut">
               <a:rPr lang="pl-PL" smtClean="0"/>
-              <a:t>8.11.2025</a:t>
+              <a:t>9.10.2026</a:t>
             </a:fld>
             <a:endParaRPr lang="pl-PL"/>
           </a:p>
@@ -5692,7 +5692,7 @@
           <a:p>
             <a:fld id="{91017B01-0C30-B241-B19F-621BE4770608}" type="datetimeFigureOut">
               <a:rPr lang="pl-PL" smtClean="0"/>
-              <a:t>8.11.2025</a:t>
+              <a:t>9.10.2026</a:t>
             </a:fld>
             <a:endParaRPr lang="pl-PL"/>
           </a:p>
@@ -5788,7 +5788,7 @@
           <a:p>
             <a:fld id="{91017B01-0C30-B241-B19F-621BE4770608}" type="datetimeFigureOut">
               <a:rPr lang="pl-PL" smtClean="0"/>
-              <a:t>8.11.2025</a:t>
+              <a:t>9.10.2026</a:t>
             </a:fld>
             <a:endParaRPr lang="pl-PL"/>
           </a:p>
@@ -6065,7 +6065,7 @@
           <a:p>
             <a:fld id="{91017B01-0C30-B241-B19F-621BE4770608}" type="datetimeFigureOut">
               <a:rPr lang="pl-PL" smtClean="0"/>
-              <a:t>8.11.2025</a:t>
+              <a:t>9.10.2026</a:t>
             </a:fld>
             <a:endParaRPr lang="pl-PL"/>
           </a:p>
@@ -6321,7 +6321,7 @@
           <a:p>
             <a:fld id="{91017B01-0C30-B241-B19F-621BE4770608}" type="datetimeFigureOut">
               <a:rPr lang="pl-PL" smtClean="0"/>
-              <a:t>8.11.2025</a:t>
+              <a:t>9.10.2026</a:t>
             </a:fld>
             <a:endParaRPr lang="pl-PL"/>
           </a:p>
@@ -6533,7 +6533,7 @@
           <a:p>
             <a:fld id="{91017B01-0C30-B241-B19F-621BE4770608}" type="datetimeFigureOut">
               <a:rPr lang="pl-PL" smtClean="0"/>
-              <a:t>8.11.2025</a:t>
+              <a:t>9.10.2026</a:t>
             </a:fld>
             <a:endParaRPr lang="pl-PL"/>
           </a:p>
@@ -7064,12 +7064,20 @@
               <a:buChar char="o"/>
             </a:pPr>
             <a:r>
+              <a:rPr lang="pl-PL" sz="1800" dirty="0" err="1">
+                <a:solidFill>
+                  <a:schemeClr val="bg1"/>
+                </a:solidFill>
+              </a:rPr>
+              <a:t>Korutyny</a:t>
+            </a:r>
+            <a:r>
               <a:rPr lang="pl-PL" sz="1800" dirty="0">
                 <a:solidFill>
                   <a:schemeClr val="bg1"/>
                 </a:solidFill>
               </a:rPr>
-              <a:t>Wprowadzenie do Wielowątkowości: </a:t>
+              <a:t> i asynchroniczność w </a:t>
             </a:r>
             <a:r>
               <a:rPr lang="pl-PL" sz="1800" dirty="0" err="1">
@@ -7077,7 +7085,7 @@
                   <a:schemeClr val="bg1"/>
                 </a:solidFill>
               </a:rPr>
-              <a:t>Coroutines</a:t>
+              <a:t>Compose</a:t>
             </a:r>
             <a:endParaRPr lang="pl-PL" sz="1800" dirty="0">
               <a:solidFill>
